--- a/slides/18-shap.pptx
+++ b/slides/18-shap.pptx
@@ -23,12 +23,12 @@
     <p:sldId id="268" r:id="rId14"/>
     <p:sldId id="269" r:id="rId15"/>
     <p:sldId id="270" r:id="rId16"/>
-    <p:sldId id="271" r:id="rId17"/>
-    <p:sldId id="272" r:id="rId18"/>
-    <p:sldId id="273" r:id="rId19"/>
-    <p:sldId id="274" r:id="rId20"/>
-    <p:sldId id="275" r:id="rId21"/>
-    <p:sldId id="276" r:id="rId22"/>
+    <p:sldId id="276" r:id="rId17"/>
+    <p:sldId id="271" r:id="rId18"/>
+    <p:sldId id="272" r:id="rId19"/>
+    <p:sldId id="273" r:id="rId20"/>
+    <p:sldId id="274" r:id="rId21"/>
+    <p:sldId id="275" r:id="rId22"/>
     <p:sldId id="277" r:id="rId23"/>
     <p:sldId id="278" r:id="rId24"/>
     <p:sldId id="279" r:id="rId25"/>
@@ -519,179 +519,17 @@
           <a:bodyPr/>
           <a:lstStyle/>
           <a:p>
-            <a:pPr fontAlgn="t"/>
             <a:r>
-              <a:rPr lang="en-US" sz="2200" b="0" i="0" dirty="0">
-                <a:solidFill>
-                  <a:schemeClr val="tx1"/>
-                </a:solidFill>
-                <a:effectLst/>
-                <a:latin typeface="Helvetica Neue"/>
-                <a:ea typeface="Helvetica Neue"/>
-                <a:cs typeface="Helvetica Neue"/>
-                <a:sym typeface="Helvetica Neue"/>
-              </a:rPr>
-              <a:t>This plot shows </a:t>
+              <a:rPr lang="en-US" dirty="0"/>
+              <a:t>SHAP computes the average marginal contribution of j.</a:t>
             </a:r>
-            <a:r>
-              <a:rPr lang="en-US" sz="2200" b="0" i="1" dirty="0">
-                <a:solidFill>
-                  <a:schemeClr val="tx1"/>
-                </a:solidFill>
-                <a:effectLst/>
-                <a:latin typeface="Helvetica Neue"/>
-                <a:ea typeface="Helvetica Neue"/>
-                <a:cs typeface="Helvetica Neue"/>
-                <a:sym typeface="Helvetica Neue"/>
-              </a:rPr>
-              <a:t>global feature importance</a:t>
-            </a:r>
-            <a:r>
-              <a:rPr lang="en-US" sz="2200" b="0" i="0" dirty="0">
-                <a:solidFill>
-                  <a:schemeClr val="tx1"/>
-                </a:solidFill>
-                <a:effectLst/>
-                <a:latin typeface="Helvetica Neue"/>
-                <a:ea typeface="Helvetica Neue"/>
-                <a:cs typeface="Helvetica Neue"/>
-                <a:sym typeface="Helvetica Neue"/>
-              </a:rPr>
-              <a:t> using the </a:t>
-            </a:r>
-            <a:r>
-              <a:rPr lang="en-US" sz="2200" b="1" i="0" dirty="0">
-                <a:solidFill>
-                  <a:schemeClr val="tx1"/>
-                </a:solidFill>
-                <a:effectLst/>
-                <a:latin typeface="Helvetica Neue"/>
-                <a:ea typeface="Helvetica Neue"/>
-                <a:cs typeface="Helvetica Neue"/>
-                <a:sym typeface="Helvetica Neue"/>
-              </a:rPr>
-              <a:t>mean absolute SHAP value</a:t>
-            </a:r>
-            <a:r>
-              <a:rPr lang="en-US" sz="2200" b="0" i="0" dirty="0">
-                <a:solidFill>
-                  <a:schemeClr val="tx1"/>
-                </a:solidFill>
-                <a:effectLst/>
-                <a:latin typeface="Helvetica Neue"/>
-                <a:ea typeface="Helvetica Neue"/>
-                <a:cs typeface="Helvetica Neue"/>
-                <a:sym typeface="Helvetica Neue"/>
-              </a:rPr>
-              <a:t> across all samples.</a:t>
-            </a:r>
-          </a:p>
-          <a:p>
-            <a:pPr fontAlgn="t"/>
-            <a:r>
-              <a:rPr lang="en-US" sz="2200" b="0" i="0" dirty="0">
-                <a:solidFill>
-                  <a:schemeClr val="tx1"/>
-                </a:solidFill>
-                <a:effectLst/>
-                <a:latin typeface="Helvetica Neue"/>
-                <a:ea typeface="Helvetica Neue"/>
-                <a:cs typeface="Helvetica Neue"/>
-                <a:sym typeface="Helvetica Neue"/>
-              </a:rPr>
-              <a:t>Each bar answers the question: </a:t>
-            </a:r>
-            <a:r>
-              <a:rPr lang="en-US" sz="2200" b="0" i="1" dirty="0">
-                <a:solidFill>
-                  <a:schemeClr val="tx1"/>
-                </a:solidFill>
-                <a:effectLst/>
-                <a:latin typeface="Helvetica Neue"/>
-                <a:ea typeface="Helvetica Neue"/>
-                <a:cs typeface="Helvetica Neue"/>
-                <a:sym typeface="Helvetica Neue"/>
-              </a:rPr>
-              <a:t>On average, how much does this feature change the model’s predictions?</a:t>
-            </a:r>
-            <a:endParaRPr lang="en-US" sz="2200" b="0" i="0" dirty="0">
-              <a:solidFill>
-                <a:schemeClr val="tx1"/>
-              </a:solidFill>
-              <a:effectLst/>
-              <a:latin typeface="Helvetica Neue"/>
-              <a:ea typeface="Helvetica Neue"/>
-              <a:cs typeface="Helvetica Neue"/>
-              <a:sym typeface="Helvetica Neue"/>
-            </a:endParaRPr>
-          </a:p>
-          <a:p>
-            <a:pPr fontAlgn="t"/>
-            <a:r>
-              <a:rPr lang="en-US" sz="2200" b="0" i="0" dirty="0">
-                <a:solidFill>
-                  <a:schemeClr val="tx1"/>
-                </a:solidFill>
-                <a:effectLst/>
-                <a:latin typeface="Helvetica Neue"/>
-                <a:ea typeface="Helvetica Neue"/>
-                <a:cs typeface="Helvetica Neue"/>
-                <a:sym typeface="Helvetica Neue"/>
-              </a:rPr>
-              <a:t>The direction of the effect is ignored here — we only care about magnitude. A larger bar means the model relies on that feature more often or more strongly.</a:t>
-            </a:r>
-          </a:p>
-          <a:p>
-            <a:pPr fontAlgn="t"/>
-            <a:r>
-              <a:rPr lang="en-US" sz="2200" b="0" i="0" dirty="0">
-                <a:solidFill>
-                  <a:schemeClr val="tx1"/>
-                </a:solidFill>
-                <a:effectLst/>
-                <a:latin typeface="Helvetica Neue"/>
-                <a:ea typeface="Helvetica Neue"/>
-                <a:cs typeface="Helvetica Neue"/>
-                <a:sym typeface="Helvetica Neue"/>
-              </a:rPr>
-              <a:t>It’s important to emphasize that this is </a:t>
-            </a:r>
-            <a:r>
-              <a:rPr lang="en-US" sz="2200" b="1" i="0" dirty="0">
-                <a:solidFill>
-                  <a:schemeClr val="tx1"/>
-                </a:solidFill>
-                <a:effectLst/>
-                <a:latin typeface="Helvetica Neue"/>
-                <a:ea typeface="Helvetica Neue"/>
-                <a:cs typeface="Helvetica Neue"/>
-                <a:sym typeface="Helvetica Neue"/>
-              </a:rPr>
-              <a:t>not causal importance</a:t>
-            </a:r>
-            <a:r>
-              <a:rPr lang="en-US" sz="2200" b="0" i="0" dirty="0">
-                <a:solidFill>
-                  <a:schemeClr val="tx1"/>
-                </a:solidFill>
-                <a:effectLst/>
-                <a:latin typeface="Helvetica Neue"/>
-                <a:ea typeface="Helvetica Neue"/>
-                <a:cs typeface="Helvetica Neue"/>
-                <a:sym typeface="Helvetica Neue"/>
-              </a:rPr>
-              <a:t>. It tells us how much the model uses a feature, not whether the feature causes the outcome.</a:t>
-            </a:r>
-          </a:p>
-          <a:p>
-            <a:endParaRPr lang="en-US" dirty="0"/>
           </a:p>
         </p:txBody>
       </p:sp>
     </p:spTree>
     <p:extLst>
       <p:ext uri="{BB962C8B-B14F-4D97-AF65-F5344CB8AC3E}">
-        <p14:creationId xmlns:p14="http://schemas.microsoft.com/office/powerpoint/2010/main" val="1644096640"/>
+        <p14:creationId xmlns:p14="http://schemas.microsoft.com/office/powerpoint/2010/main" val="2768323826"/>
       </p:ext>
     </p:extLst>
   </p:cSld>
@@ -770,7 +608,7 @@
                 <a:cs typeface="Helvetica Neue"/>
                 <a:sym typeface="Helvetica Neue"/>
               </a:rPr>
-              <a:t>how</a:t>
+              <a:t>global feature importance</a:t>
             </a:r>
             <a:r>
               <a:rPr lang="en-US" sz="2200" b="0" i="0" dirty="0">
@@ -783,7 +621,33 @@
                 <a:cs typeface="Helvetica Neue"/>
                 <a:sym typeface="Helvetica Neue"/>
               </a:rPr>
-              <a:t> a feature affects predictions, not just how important it is.</a:t>
+              <a:t> using the </a:t>
+            </a:r>
+            <a:r>
+              <a:rPr lang="en-US" sz="2200" b="1" i="0" dirty="0">
+                <a:solidFill>
+                  <a:schemeClr val="tx1"/>
+                </a:solidFill>
+                <a:effectLst/>
+                <a:latin typeface="Helvetica Neue"/>
+                <a:ea typeface="Helvetica Neue"/>
+                <a:cs typeface="Helvetica Neue"/>
+                <a:sym typeface="Helvetica Neue"/>
+              </a:rPr>
+              <a:t>mean absolute SHAP value</a:t>
+            </a:r>
+            <a:r>
+              <a:rPr lang="en-US" sz="2200" b="0" i="0" dirty="0">
+                <a:solidFill>
+                  <a:schemeClr val="tx1"/>
+                </a:solidFill>
+                <a:effectLst/>
+                <a:latin typeface="Helvetica Neue"/>
+                <a:ea typeface="Helvetica Neue"/>
+                <a:cs typeface="Helvetica Neue"/>
+                <a:sym typeface="Helvetica Neue"/>
+              </a:rPr>
+              <a:t> across all samples.</a:t>
             </a:r>
           </a:p>
           <a:p>
@@ -799,7 +663,46 @@
                 <a:cs typeface="Helvetica Neue"/>
                 <a:sym typeface="Helvetica Neue"/>
               </a:rPr>
-              <a:t>The x‑axis is the actual feature value, and the y‑axis is the SHAP value — how much that feature pushes the prediction up or down.</a:t>
+              <a:t>Each bar answers the question: </a:t>
+            </a:r>
+            <a:r>
+              <a:rPr lang="en-US" sz="2200" b="0" i="1" dirty="0">
+                <a:solidFill>
+                  <a:schemeClr val="tx1"/>
+                </a:solidFill>
+                <a:effectLst/>
+                <a:latin typeface="Helvetica Neue"/>
+                <a:ea typeface="Helvetica Neue"/>
+                <a:cs typeface="Helvetica Neue"/>
+                <a:sym typeface="Helvetica Neue"/>
+              </a:rPr>
+              <a:t>On average, how much does this feature change the model’s predictions?</a:t>
+            </a:r>
+            <a:endParaRPr lang="en-US" sz="2200" b="0" i="0" dirty="0">
+              <a:solidFill>
+                <a:schemeClr val="tx1"/>
+              </a:solidFill>
+              <a:effectLst/>
+              <a:latin typeface="Helvetica Neue"/>
+              <a:ea typeface="Helvetica Neue"/>
+              <a:cs typeface="Helvetica Neue"/>
+              <a:sym typeface="Helvetica Neue"/>
+            </a:endParaRPr>
+          </a:p>
+          <a:p>
+            <a:pPr fontAlgn="t"/>
+            <a:r>
+              <a:rPr lang="en-US" sz="2200" b="0" i="0" dirty="0">
+                <a:solidFill>
+                  <a:schemeClr val="tx1"/>
+                </a:solidFill>
+                <a:effectLst/>
+                <a:latin typeface="Helvetica Neue"/>
+                <a:ea typeface="Helvetica Neue"/>
+                <a:cs typeface="Helvetica Neue"/>
+                <a:sym typeface="Helvetica Neue"/>
+              </a:rPr>
+              <a:t>The direction of the effect is ignored here — we only care about magnitude. A larger bar means the model relies on that feature more often or more strongly.</a:t>
             </a:r>
           </a:p>
           <a:p>
@@ -815,13 +718,10 @@
                 <a:cs typeface="Helvetica Neue"/>
                 <a:sym typeface="Helvetica Neue"/>
               </a:rPr>
-              <a:t>Positive SHAP values increase the prediction; negative values decrease it.</a:t>
+              <a:t>It’s important to emphasize that this is </a:t>
             </a:r>
-          </a:p>
-          <a:p>
-            <a:pPr fontAlgn="t"/>
             <a:r>
-              <a:rPr lang="en-US" sz="2200" b="0" i="0" dirty="0">
+              <a:rPr lang="en-US" sz="2200" b="1" i="0" dirty="0">
                 <a:solidFill>
                   <a:schemeClr val="tx1"/>
                 </a:solidFill>
@@ -831,7 +731,20 @@
                 <a:cs typeface="Helvetica Neue"/>
                 <a:sym typeface="Helvetica Neue"/>
               </a:rPr>
-              <a:t>Vertical spread indicates nonlinear or context‑dependent effects, meaning the same feature value can have different impacts depending on other features.</a:t>
+              <a:t>not causal importance</a:t>
+            </a:r>
+            <a:r>
+              <a:rPr lang="en-US" sz="2200" b="0" i="0" dirty="0">
+                <a:solidFill>
+                  <a:schemeClr val="tx1"/>
+                </a:solidFill>
+                <a:effectLst/>
+                <a:latin typeface="Helvetica Neue"/>
+                <a:ea typeface="Helvetica Neue"/>
+                <a:cs typeface="Helvetica Neue"/>
+                <a:sym typeface="Helvetica Neue"/>
+              </a:rPr>
+              <a:t>. It tells us how much the model uses a feature, not whether the feature causes the outcome.</a:t>
             </a:r>
           </a:p>
           <a:p>
@@ -842,7 +755,7 @@
     </p:spTree>
     <p:extLst>
       <p:ext uri="{BB962C8B-B14F-4D97-AF65-F5344CB8AC3E}">
-        <p14:creationId xmlns:p14="http://schemas.microsoft.com/office/powerpoint/2010/main" val="2995909378"/>
+        <p14:creationId xmlns:p14="http://schemas.microsoft.com/office/powerpoint/2010/main" val="1644096640"/>
       </p:ext>
     </p:extLst>
   </p:cSld>
@@ -908,6 +821,157 @@
                 <a:cs typeface="Helvetica Neue"/>
                 <a:sym typeface="Helvetica Neue"/>
               </a:rPr>
+              <a:t>This plot shows </a:t>
+            </a:r>
+            <a:r>
+              <a:rPr lang="en-US" sz="2200" b="0" i="1" dirty="0">
+                <a:solidFill>
+                  <a:schemeClr val="tx1"/>
+                </a:solidFill>
+                <a:effectLst/>
+                <a:latin typeface="Helvetica Neue"/>
+                <a:ea typeface="Helvetica Neue"/>
+                <a:cs typeface="Helvetica Neue"/>
+                <a:sym typeface="Helvetica Neue"/>
+              </a:rPr>
+              <a:t>how</a:t>
+            </a:r>
+            <a:r>
+              <a:rPr lang="en-US" sz="2200" b="0" i="0" dirty="0">
+                <a:solidFill>
+                  <a:schemeClr val="tx1"/>
+                </a:solidFill>
+                <a:effectLst/>
+                <a:latin typeface="Helvetica Neue"/>
+                <a:ea typeface="Helvetica Neue"/>
+                <a:cs typeface="Helvetica Neue"/>
+                <a:sym typeface="Helvetica Neue"/>
+              </a:rPr>
+              <a:t> a feature affects predictions, not just how important it is.</a:t>
+            </a:r>
+          </a:p>
+          <a:p>
+            <a:pPr fontAlgn="t"/>
+            <a:r>
+              <a:rPr lang="en-US" sz="2200" b="0" i="0" dirty="0">
+                <a:solidFill>
+                  <a:schemeClr val="tx1"/>
+                </a:solidFill>
+                <a:effectLst/>
+                <a:latin typeface="Helvetica Neue"/>
+                <a:ea typeface="Helvetica Neue"/>
+                <a:cs typeface="Helvetica Neue"/>
+                <a:sym typeface="Helvetica Neue"/>
+              </a:rPr>
+              <a:t>The x‑axis is the actual feature value, and the y‑axis is the SHAP value — how much that feature pushes the prediction up or down.</a:t>
+            </a:r>
+          </a:p>
+          <a:p>
+            <a:pPr fontAlgn="t"/>
+            <a:r>
+              <a:rPr lang="en-US" sz="2200" b="0" i="0" dirty="0">
+                <a:solidFill>
+                  <a:schemeClr val="tx1"/>
+                </a:solidFill>
+                <a:effectLst/>
+                <a:latin typeface="Helvetica Neue"/>
+                <a:ea typeface="Helvetica Neue"/>
+                <a:cs typeface="Helvetica Neue"/>
+                <a:sym typeface="Helvetica Neue"/>
+              </a:rPr>
+              <a:t>Positive SHAP values increase the prediction; negative values decrease it.</a:t>
+            </a:r>
+          </a:p>
+          <a:p>
+            <a:pPr fontAlgn="t"/>
+            <a:r>
+              <a:rPr lang="en-US" sz="2200" b="0" i="0" dirty="0">
+                <a:solidFill>
+                  <a:schemeClr val="tx1"/>
+                </a:solidFill>
+                <a:effectLst/>
+                <a:latin typeface="Helvetica Neue"/>
+                <a:ea typeface="Helvetica Neue"/>
+                <a:cs typeface="Helvetica Neue"/>
+                <a:sym typeface="Helvetica Neue"/>
+              </a:rPr>
+              <a:t>Vertical spread indicates nonlinear or context‑dependent effects, meaning the same feature value can have different impacts depending on other features.</a:t>
+            </a:r>
+          </a:p>
+          <a:p>
+            <a:endParaRPr lang="en-US" dirty="0"/>
+          </a:p>
+        </p:txBody>
+      </p:sp>
+    </p:spTree>
+    <p:extLst>
+      <p:ext uri="{BB962C8B-B14F-4D97-AF65-F5344CB8AC3E}">
+        <p14:creationId xmlns:p14="http://schemas.microsoft.com/office/powerpoint/2010/main" val="2995909378"/>
+      </p:ext>
+    </p:extLst>
+  </p:cSld>
+  <p:clrMapOvr>
+    <a:masterClrMapping/>
+  </p:clrMapOvr>
+</p:notes>
+</file>
+
+<file path=ppt/notesSlides/notesSlide4.xml><?xml version="1.0" encoding="utf-8"?>
+<p:notes xmlns:a="http://schemas.openxmlformats.org/drawingml/2006/main" xmlns:r="http://schemas.openxmlformats.org/officeDocument/2006/relationships" xmlns:p="http://schemas.openxmlformats.org/presentationml/2006/main">
+  <p:cSld>
+    <p:spTree>
+      <p:nvGrpSpPr>
+        <p:cNvPr id="1" name=""/>
+        <p:cNvGrpSpPr/>
+        <p:nvPr/>
+      </p:nvGrpSpPr>
+      <p:grpSpPr>
+        <a:xfrm>
+          <a:off x="0" y="0"/>
+          <a:ext cx="0" cy="0"/>
+          <a:chOff x="0" y="0"/>
+          <a:chExt cx="0" cy="0"/>
+        </a:xfrm>
+      </p:grpSpPr>
+      <p:sp>
+        <p:nvSpPr>
+          <p:cNvPr id="2" name="Slide Image Placeholder 1"/>
+          <p:cNvSpPr>
+            <a:spLocks noGrp="1" noRot="1" noChangeAspect="1"/>
+          </p:cNvSpPr>
+          <p:nvPr>
+            <p:ph type="sldImg"/>
+          </p:nvPr>
+        </p:nvSpPr>
+        <p:spPr/>
+      </p:sp>
+      <p:sp>
+        <p:nvSpPr>
+          <p:cNvPr id="3" name="Notes Placeholder 2"/>
+          <p:cNvSpPr>
+            <a:spLocks noGrp="1"/>
+          </p:cNvSpPr>
+          <p:nvPr>
+            <p:ph type="body" idx="1"/>
+          </p:nvPr>
+        </p:nvSpPr>
+        <p:spPr/>
+        <p:txBody>
+          <a:bodyPr/>
+          <a:lstStyle/>
+          <a:p>
+            <a:pPr fontAlgn="t"/>
+            <a:r>
+              <a:rPr lang="en-US" sz="2200" b="0" i="0" dirty="0">
+                <a:solidFill>
+                  <a:schemeClr val="tx1"/>
+                </a:solidFill>
+                <a:effectLst/>
+                <a:latin typeface="Helvetica Neue"/>
+                <a:ea typeface="Helvetica Neue"/>
+                <a:cs typeface="Helvetica Neue"/>
+                <a:sym typeface="Helvetica Neue"/>
+              </a:rPr>
               <a:t>The </a:t>
             </a:r>
             <a:r>
@@ -1071,7 +1135,7 @@
 </p:notes>
 </file>
 
-<file path=ppt/notesSlides/notesSlide4.xml><?xml version="1.0" encoding="utf-8"?>
+<file path=ppt/notesSlides/notesSlide5.xml><?xml version="1.0" encoding="utf-8"?>
 <p:notes xmlns:a="http://schemas.openxmlformats.org/drawingml/2006/main" xmlns:r="http://schemas.openxmlformats.org/officeDocument/2006/relationships" xmlns:p="http://schemas.openxmlformats.org/presentationml/2006/main">
   <p:cSld>
     <p:spTree>
@@ -9020,6 +9084,204 @@
       </p:grpSpPr>
       <p:sp>
         <p:nvSpPr>
+          <p:cNvPr id="411" name="(Slightly different meaning than the mathematical consistency property)…">
+            <a:extLst>
+              <a:ext uri="{FF2B5EF4-FFF2-40B4-BE49-F238E27FC236}">
+                <a16:creationId xmlns:a16="http://schemas.microsoft.com/office/drawing/2014/main" id="{0AD86FC0-EDF5-B9C7-7859-87BD93A609E2}"/>
+              </a:ext>
+            </a:extLst>
+          </p:cNvPr>
+          <p:cNvSpPr txBox="1">
+            <a:spLocks noGrp="1" noRot="1" noChangeAspect="1" noMove="1" noResize="1" noEditPoints="1" noAdjustHandles="1" noChangeArrowheads="1" noChangeShapeType="1" noTextEdit="1"/>
+          </p:cNvSpPr>
+          <p:nvPr>
+            <p:ph type="body" idx="1"/>
+          </p:nvPr>
+        </p:nvSpPr>
+        <p:spPr>
+          <a:xfrm>
+            <a:off x="698500" y="1924756"/>
+            <a:ext cx="11607800" cy="7640537"/>
+          </a:xfrm>
+          <a:blipFill>
+            <a:blip r:embed="rId2"/>
+            <a:stretch>
+              <a:fillRect l="-1313" t="-1516" r="-1471"/>
+            </a:stretch>
+          </a:blipFill>
+          <a:ln w="12700">
+            <a:miter lim="400000"/>
+          </a:ln>
+        </p:spPr>
+        <p:txBody>
+          <a:bodyPr/>
+          <a:lstStyle/>
+          <a:p>
+            <a:r>
+              <a:rPr lang="en-US">
+                <a:noFill/>
+              </a:rPr>
+              <a:t> </a:t>
+            </a:r>
+          </a:p>
+        </p:txBody>
+      </p:sp>
+      <p:sp>
+        <p:nvSpPr>
+          <p:cNvPr id="412" name="SHapley Additive exPlanations">
+            <a:extLst>
+              <a:ext uri="{FF2B5EF4-FFF2-40B4-BE49-F238E27FC236}">
+                <a16:creationId xmlns:a16="http://schemas.microsoft.com/office/drawing/2014/main" id="{85A60CAC-C6BB-8DC5-55EC-63B6703D4A80}"/>
+              </a:ext>
+            </a:extLst>
+          </p:cNvPr>
+          <p:cNvSpPr txBox="1">
+            <a:spLocks noGrp="1"/>
+          </p:cNvSpPr>
+          <p:nvPr>
+            <p:ph type="title"/>
+          </p:nvPr>
+        </p:nvSpPr>
+        <p:spPr/>
+        <p:txBody>
+          <a:bodyPr/>
+          <a:lstStyle/>
+          <a:p>
+            <a:pPr defTabSz="1265768" eaLnBrk="1" fontAlgn="auto" hangingPunct="1">
+              <a:spcBef>
+                <a:spcPts val="0"/>
+              </a:spcBef>
+              <a:spcAft>
+                <a:spcPts val="0"/>
+              </a:spcAft>
+              <a:defRPr sz="5986" spc="-119">
+                <a:latin typeface="Helvetica Neue Medium"/>
+                <a:ea typeface="Helvetica Neue Medium"/>
+                <a:cs typeface="Helvetica Neue Medium"/>
+                <a:sym typeface="Helvetica Neue Medium"/>
+              </a:defRPr>
+            </a:pPr>
+            <a:r>
+              <a:rPr sz="5986">
+                <a:solidFill>
+                  <a:srgbClr val="009193"/>
+                </a:solidFill>
+                <a:latin typeface="Helvetica Neue UltraLight"/>
+                <a:ea typeface="Helvetica Neue UltraLight"/>
+                <a:cs typeface="Helvetica Neue UltraLight"/>
+                <a:sym typeface="Helvetica Neue UltraLight"/>
+              </a:rPr>
+              <a:t>SH</a:t>
+            </a:r>
+            <a:r>
+              <a:rPr sz="5986">
+                <a:latin typeface="Helvetica Neue UltraLight"/>
+                <a:ea typeface="Helvetica Neue UltraLight"/>
+                <a:cs typeface="Helvetica Neue UltraLight"/>
+                <a:sym typeface="Helvetica Neue UltraLight"/>
+              </a:rPr>
+              <a:t>apley</a:t>
+            </a:r>
+            <a:r>
+              <a:rPr sz="5986">
+                <a:latin typeface="Helvetica Neue Medium"/>
+                <a:ea typeface="Helvetica Neue Medium"/>
+                <a:cs typeface="Helvetica Neue Medium"/>
+                <a:sym typeface="Helvetica Neue Medium"/>
+              </a:rPr>
+              <a:t> </a:t>
+            </a:r>
+            <a:r>
+              <a:rPr sz="5986" b="1">
+                <a:solidFill>
+                  <a:srgbClr val="009193"/>
+                </a:solidFill>
+                <a:latin typeface="Helvetica Neue"/>
+                <a:ea typeface="Helvetica Neue"/>
+                <a:cs typeface="Helvetica Neue"/>
+                <a:sym typeface="Helvetica Neue"/>
+              </a:rPr>
+              <a:t>A</a:t>
+            </a:r>
+            <a:r>
+              <a:rPr sz="5986" b="1">
+                <a:latin typeface="Helvetica Neue"/>
+                <a:ea typeface="Helvetica Neue"/>
+                <a:cs typeface="Helvetica Neue"/>
+                <a:sym typeface="Helvetica Neue"/>
+              </a:rPr>
+              <a:t>dditive</a:t>
+            </a:r>
+            <a:r>
+              <a:rPr sz="5986">
+                <a:latin typeface="Helvetica Neue Medium"/>
+                <a:ea typeface="Helvetica Neue Medium"/>
+                <a:cs typeface="Helvetica Neue Medium"/>
+                <a:sym typeface="Helvetica Neue Medium"/>
+              </a:rPr>
+              <a:t> </a:t>
+            </a:r>
+            <a:r>
+              <a:rPr sz="5986">
+                <a:latin typeface="Helvetica Neue UltraLight"/>
+                <a:ea typeface="Helvetica Neue UltraLight"/>
+                <a:cs typeface="Helvetica Neue UltraLight"/>
+                <a:sym typeface="Helvetica Neue UltraLight"/>
+              </a:rPr>
+              <a:t>ex</a:t>
+            </a:r>
+            <a:r>
+              <a:rPr sz="5986">
+                <a:solidFill>
+                  <a:srgbClr val="009193"/>
+                </a:solidFill>
+                <a:latin typeface="Helvetica Neue UltraLight"/>
+                <a:ea typeface="Helvetica Neue UltraLight"/>
+                <a:cs typeface="Helvetica Neue UltraLight"/>
+                <a:sym typeface="Helvetica Neue UltraLight"/>
+              </a:rPr>
+              <a:t>P</a:t>
+            </a:r>
+            <a:r>
+              <a:rPr sz="5986">
+                <a:latin typeface="Helvetica Neue UltraLight"/>
+                <a:ea typeface="Helvetica Neue UltraLight"/>
+                <a:cs typeface="Helvetica Neue UltraLight"/>
+                <a:sym typeface="Helvetica Neue UltraLight"/>
+              </a:rPr>
+              <a:t>lanations</a:t>
+            </a:r>
+          </a:p>
+        </p:txBody>
+      </p:sp>
+    </p:spTree>
+  </p:cSld>
+  <p:clrMapOvr>
+    <a:masterClrMapping/>
+  </p:clrMapOvr>
+  <p:transition spd="med"/>
+</p:sld>
+</file>
+
+<file path=ppt/slides/slide17.xml><?xml version="1.0" encoding="utf-8"?>
+<p:sld xmlns:a="http://schemas.openxmlformats.org/drawingml/2006/main" xmlns:r="http://schemas.openxmlformats.org/officeDocument/2006/relationships" xmlns:p="http://schemas.openxmlformats.org/presentationml/2006/main">
+  <p:cSld>
+    <p:spTree>
+      <p:nvGrpSpPr>
+        <p:cNvPr id="1" name=""/>
+        <p:cNvGrpSpPr/>
+        <p:nvPr/>
+      </p:nvGrpSpPr>
+      <p:grpSpPr>
+        <a:xfrm>
+          <a:off x="0" y="0"/>
+          <a:ext cx="0" cy="0"/>
+          <a:chOff x="0" y="0"/>
+          <a:chExt cx="0" cy="0"/>
+        </a:xfrm>
+      </p:grpSpPr>
+      <p:sp>
+        <p:nvSpPr>
           <p:cNvPr id="395" name="SHAP values">
             <a:extLst>
               <a:ext uri="{FF2B5EF4-FFF2-40B4-BE49-F238E27FC236}">
@@ -9081,7 +9343,7 @@
             <a:avLst/>
           </a:prstGeom>
           <a:blipFill>
-            <a:blip r:embed="rId2"/>
+            <a:blip r:embed="rId3"/>
             <a:stretch>
               <a:fillRect l="-1313" t="-1887"/>
             </a:stretch>
@@ -9103,8 +9365,8 @@
           </a:p>
         </p:txBody>
       </p:sp>
-      <mc:AlternateContent xmlns:mc="http://schemas.openxmlformats.org/markup-compatibility/2006">
-        <mc:Choice xmlns:a14="http://schemas.microsoft.com/office/drawing/2010/main" Requires="a14">
+      <mc:AlternateContent xmlns:mc="http://schemas.openxmlformats.org/markup-compatibility/2006" xmlns:a14="http://schemas.microsoft.com/office/drawing/2010/main">
+        <mc:Choice Requires="a14">
           <p:sp>
             <p:nvSpPr>
               <p:cNvPr id="3" name="TextBox 2">
@@ -9787,7 +10049,7 @@
             </p:txBody>
           </p:sp>
         </mc:Choice>
-        <mc:Fallback>
+        <mc:Fallback xmlns="">
           <p:sp>
             <p:nvSpPr>
               <p:cNvPr id="3" name="TextBox 2">
@@ -9811,7 +10073,7 @@
                 <a:avLst/>
               </a:prstGeom>
               <a:blipFill>
-                <a:blip r:embed="rId3"/>
+                <a:blip r:embed="rId4"/>
                 <a:stretch>
                   <a:fillRect l="-1284" t="-2778"/>
                 </a:stretch>
@@ -9846,7 +10108,7 @@
 </p:sld>
 </file>
 
-<file path=ppt/slides/slide17.xml><?xml version="1.0" encoding="utf-8"?>
+<file path=ppt/slides/slide18.xml><?xml version="1.0" encoding="utf-8"?>
 <p:sld xmlns:a="http://schemas.openxmlformats.org/drawingml/2006/main" xmlns:r="http://schemas.openxmlformats.org/officeDocument/2006/relationships" xmlns:p="http://schemas.openxmlformats.org/presentationml/2006/main">
   <p:cSld>
     <p:spTree>
@@ -9863,8 +10125,8 @@
           <a:chExt cx="0" cy="0"/>
         </a:xfrm>
       </p:grpSpPr>
-      <mc:AlternateContent xmlns:mc="http://schemas.openxmlformats.org/markup-compatibility/2006">
-        <mc:Choice xmlns:a14="http://schemas.microsoft.com/office/drawing/2010/main" Requires="a14">
+      <mc:AlternateContent xmlns:mc="http://schemas.openxmlformats.org/markup-compatibility/2006" xmlns:a14="http://schemas.microsoft.com/office/drawing/2010/main">
+        <mc:Choice Requires="a14">
           <p:sp>
             <p:nvSpPr>
               <p:cNvPr id="31746" name="These properties are directly derived from the axioms of Shapley values in cooperative game theory…">
@@ -9958,7 +10220,7 @@
             </p:txBody>
           </p:sp>
         </mc:Choice>
-        <mc:Fallback>
+        <mc:Fallback xmlns="">
           <p:sp>
             <p:nvSpPr>
               <p:cNvPr id="31746" name="These properties are directly derived from the axioms of Shapley values in cooperative game theory…">
@@ -10108,7 +10370,7 @@
 </p:sld>
 </file>
 
-<file path=ppt/slides/slide18.xml><?xml version="1.0" encoding="utf-8"?>
+<file path=ppt/slides/slide19.xml><?xml version="1.0" encoding="utf-8"?>
 <p:sld xmlns:a="http://schemas.openxmlformats.org/drawingml/2006/main" xmlns:r="http://schemas.openxmlformats.org/officeDocument/2006/relationships" xmlns:p="http://schemas.openxmlformats.org/presentationml/2006/main">
   <p:cSld>
     <p:spTree>
@@ -10205,116 +10467,6 @@
             </a:pPr>
             <a:r>
               <a:t>Properties of SHAP: Efficiency </a:t>
-            </a:r>
-          </a:p>
-        </p:txBody>
-      </p:sp>
-    </p:spTree>
-  </p:cSld>
-  <p:clrMapOvr>
-    <a:masterClrMapping/>
-  </p:clrMapOvr>
-  <p:transition spd="med"/>
-</p:sld>
-</file>
-
-<file path=ppt/slides/slide19.xml><?xml version="1.0" encoding="utf-8"?>
-<p:sld xmlns:a="http://schemas.openxmlformats.org/drawingml/2006/main" xmlns:r="http://schemas.openxmlformats.org/officeDocument/2006/relationships" xmlns:p="http://schemas.openxmlformats.org/presentationml/2006/main">
-  <p:cSld>
-    <p:spTree>
-      <p:nvGrpSpPr>
-        <p:cNvPr id="1" name=""/>
-        <p:cNvGrpSpPr/>
-        <p:nvPr/>
-      </p:nvGrpSpPr>
-      <p:grpSpPr>
-        <a:xfrm>
-          <a:off x="0" y="0"/>
-          <a:ext cx="0" cy="0"/>
-          <a:chOff x="0" y="0"/>
-          <a:chExt cx="0" cy="0"/>
-        </a:xfrm>
-      </p:grpSpPr>
-      <p:sp>
-        <p:nvSpPr>
-          <p:cNvPr id="405" name="If   for all  , then…">
-            <a:extLst>
-              <a:ext uri="{FF2B5EF4-FFF2-40B4-BE49-F238E27FC236}">
-                <a16:creationId xmlns:a16="http://schemas.microsoft.com/office/drawing/2014/main" id="{BFB9C5D9-9901-5A93-6D3E-0CCB33500500}"/>
-              </a:ext>
-            </a:extLst>
-          </p:cNvPr>
-          <p:cNvSpPr txBox="1">
-            <a:spLocks noGrp="1" noRot="1" noChangeAspect="1" noMove="1" noResize="1" noEditPoints="1" noAdjustHandles="1" noChangeArrowheads="1" noChangeShapeType="1" noTextEdit="1"/>
-          </p:cNvSpPr>
-          <p:nvPr>
-            <p:ph type="body" idx="1"/>
-          </p:nvPr>
-        </p:nvSpPr>
-        <p:spPr>
-          <a:xfrm>
-            <a:off x="698500" y="1949480"/>
-            <a:ext cx="11607800" cy="7640537"/>
-          </a:xfrm>
-          <a:blipFill>
-            <a:blip r:embed="rId2"/>
-            <a:stretch>
-              <a:fillRect l="-1313" t="-958"/>
-            </a:stretch>
-          </a:blipFill>
-          <a:ln w="12700">
-            <a:miter lim="400000"/>
-          </a:ln>
-        </p:spPr>
-        <p:txBody>
-          <a:bodyPr/>
-          <a:lstStyle/>
-          <a:p>
-            <a:r>
-              <a:rPr lang="en-US">
-                <a:noFill/>
-              </a:rPr>
-              <a:t> </a:t>
-            </a:r>
-          </a:p>
-        </p:txBody>
-      </p:sp>
-      <p:sp>
-        <p:nvSpPr>
-          <p:cNvPr id="406" name="Properties of SHAP: Symmetry">
-            <a:extLst>
-              <a:ext uri="{FF2B5EF4-FFF2-40B4-BE49-F238E27FC236}">
-                <a16:creationId xmlns:a16="http://schemas.microsoft.com/office/drawing/2014/main" id="{1CBB646A-C0FE-E2B5-6B9A-2C69472A4052}"/>
-              </a:ext>
-            </a:extLst>
-          </p:cNvPr>
-          <p:cNvSpPr txBox="1">
-            <a:spLocks noGrp="1"/>
-          </p:cNvSpPr>
-          <p:nvPr>
-            <p:ph type="title"/>
-          </p:nvPr>
-        </p:nvSpPr>
-        <p:spPr/>
-        <p:txBody>
-          <a:bodyPr/>
-          <a:lstStyle>
-            <a:lvl1pPr defTabSz="1525858">
-              <a:defRPr sz="5280" spc="-105"/>
-            </a:lvl1pPr>
-          </a:lstStyle>
-          <a:p>
-            <a:pPr eaLnBrk="1" fontAlgn="auto" hangingPunct="1">
-              <a:spcBef>
-                <a:spcPts val="0"/>
-              </a:spcBef>
-              <a:spcAft>
-                <a:spcPts val="0"/>
-              </a:spcAft>
-              <a:defRPr/>
-            </a:pPr>
-            <a:r>
-              <a:t>Properties of SHAP: Symmetry </a:t>
             </a:r>
           </a:p>
         </p:txBody>
@@ -10545,6 +10697,116 @@
       </p:grpSpPr>
       <p:sp>
         <p:nvSpPr>
+          <p:cNvPr id="405" name="If   for all  , then…">
+            <a:extLst>
+              <a:ext uri="{FF2B5EF4-FFF2-40B4-BE49-F238E27FC236}">
+                <a16:creationId xmlns:a16="http://schemas.microsoft.com/office/drawing/2014/main" id="{BFB9C5D9-9901-5A93-6D3E-0CCB33500500}"/>
+              </a:ext>
+            </a:extLst>
+          </p:cNvPr>
+          <p:cNvSpPr txBox="1">
+            <a:spLocks noGrp="1" noRot="1" noChangeAspect="1" noMove="1" noResize="1" noEditPoints="1" noAdjustHandles="1" noChangeArrowheads="1" noChangeShapeType="1" noTextEdit="1"/>
+          </p:cNvSpPr>
+          <p:nvPr>
+            <p:ph type="body" idx="1"/>
+          </p:nvPr>
+        </p:nvSpPr>
+        <p:spPr>
+          <a:xfrm>
+            <a:off x="698500" y="1949480"/>
+            <a:ext cx="11607800" cy="7640537"/>
+          </a:xfrm>
+          <a:blipFill>
+            <a:blip r:embed="rId2"/>
+            <a:stretch>
+              <a:fillRect l="-1313" t="-958"/>
+            </a:stretch>
+          </a:blipFill>
+          <a:ln w="12700">
+            <a:miter lim="400000"/>
+          </a:ln>
+        </p:spPr>
+        <p:txBody>
+          <a:bodyPr/>
+          <a:lstStyle/>
+          <a:p>
+            <a:r>
+              <a:rPr lang="en-US">
+                <a:noFill/>
+              </a:rPr>
+              <a:t> </a:t>
+            </a:r>
+          </a:p>
+        </p:txBody>
+      </p:sp>
+      <p:sp>
+        <p:nvSpPr>
+          <p:cNvPr id="406" name="Properties of SHAP: Symmetry">
+            <a:extLst>
+              <a:ext uri="{FF2B5EF4-FFF2-40B4-BE49-F238E27FC236}">
+                <a16:creationId xmlns:a16="http://schemas.microsoft.com/office/drawing/2014/main" id="{1CBB646A-C0FE-E2B5-6B9A-2C69472A4052}"/>
+              </a:ext>
+            </a:extLst>
+          </p:cNvPr>
+          <p:cNvSpPr txBox="1">
+            <a:spLocks noGrp="1"/>
+          </p:cNvSpPr>
+          <p:nvPr>
+            <p:ph type="title"/>
+          </p:nvPr>
+        </p:nvSpPr>
+        <p:spPr/>
+        <p:txBody>
+          <a:bodyPr/>
+          <a:lstStyle>
+            <a:lvl1pPr defTabSz="1525858">
+              <a:defRPr sz="5280" spc="-105"/>
+            </a:lvl1pPr>
+          </a:lstStyle>
+          <a:p>
+            <a:pPr eaLnBrk="1" fontAlgn="auto" hangingPunct="1">
+              <a:spcBef>
+                <a:spcPts val="0"/>
+              </a:spcBef>
+              <a:spcAft>
+                <a:spcPts val="0"/>
+              </a:spcAft>
+              <a:defRPr/>
+            </a:pPr>
+            <a:r>
+              <a:t>Properties of SHAP: Symmetry </a:t>
+            </a:r>
+          </a:p>
+        </p:txBody>
+      </p:sp>
+    </p:spTree>
+  </p:cSld>
+  <p:clrMapOvr>
+    <a:masterClrMapping/>
+  </p:clrMapOvr>
+  <p:transition spd="med"/>
+</p:sld>
+</file>
+
+<file path=ppt/slides/slide21.xml><?xml version="1.0" encoding="utf-8"?>
+<p:sld xmlns:a="http://schemas.openxmlformats.org/drawingml/2006/main" xmlns:r="http://schemas.openxmlformats.org/officeDocument/2006/relationships" xmlns:p="http://schemas.openxmlformats.org/presentationml/2006/main">
+  <p:cSld>
+    <p:spTree>
+      <p:nvGrpSpPr>
+        <p:cNvPr id="1" name=""/>
+        <p:cNvGrpSpPr/>
+        <p:nvPr/>
+      </p:nvGrpSpPr>
+      <p:grpSpPr>
+        <a:xfrm>
+          <a:off x="0" y="0"/>
+          <a:ext cx="0" cy="0"/>
+          <a:chOff x="0" y="0"/>
+          <a:chExt cx="0" cy="0"/>
+        </a:xfrm>
+      </p:grpSpPr>
+      <p:sp>
+        <p:nvSpPr>
           <p:cNvPr id="34818" name="Mathematical Consistency…">
             <a:extLst>
               <a:ext uri="{FF2B5EF4-FFF2-40B4-BE49-F238E27FC236}">
@@ -10627,204 +10889,6 @@
             </a:pPr>
             <a:r>
               <a:t>Properties of SHAP: Additivity </a:t>
-            </a:r>
-          </a:p>
-        </p:txBody>
-      </p:sp>
-    </p:spTree>
-  </p:cSld>
-  <p:clrMapOvr>
-    <a:masterClrMapping/>
-  </p:clrMapOvr>
-  <p:transition spd="med"/>
-</p:sld>
-</file>
-
-<file path=ppt/slides/slide21.xml><?xml version="1.0" encoding="utf-8"?>
-<p:sld xmlns:a="http://schemas.openxmlformats.org/drawingml/2006/main" xmlns:r="http://schemas.openxmlformats.org/officeDocument/2006/relationships" xmlns:p="http://schemas.openxmlformats.org/presentationml/2006/main">
-  <p:cSld>
-    <p:spTree>
-      <p:nvGrpSpPr>
-        <p:cNvPr id="1" name=""/>
-        <p:cNvGrpSpPr/>
-        <p:nvPr/>
-      </p:nvGrpSpPr>
-      <p:grpSpPr>
-        <a:xfrm>
-          <a:off x="0" y="0"/>
-          <a:ext cx="0" cy="0"/>
-          <a:chOff x="0" y="0"/>
-          <a:chExt cx="0" cy="0"/>
-        </a:xfrm>
-      </p:grpSpPr>
-      <p:sp>
-        <p:nvSpPr>
-          <p:cNvPr id="411" name="(Slightly different meaning than the mathematical consistency property)…">
-            <a:extLst>
-              <a:ext uri="{FF2B5EF4-FFF2-40B4-BE49-F238E27FC236}">
-                <a16:creationId xmlns:a16="http://schemas.microsoft.com/office/drawing/2014/main" id="{0AD86FC0-EDF5-B9C7-7859-87BD93A609E2}"/>
-              </a:ext>
-            </a:extLst>
-          </p:cNvPr>
-          <p:cNvSpPr txBox="1">
-            <a:spLocks noGrp="1" noRot="1" noChangeAspect="1" noMove="1" noResize="1" noEditPoints="1" noAdjustHandles="1" noChangeArrowheads="1" noChangeShapeType="1" noTextEdit="1"/>
-          </p:cNvSpPr>
-          <p:nvPr>
-            <p:ph type="body" idx="1"/>
-          </p:nvPr>
-        </p:nvSpPr>
-        <p:spPr>
-          <a:xfrm>
-            <a:off x="698500" y="1924756"/>
-            <a:ext cx="11607800" cy="7640537"/>
-          </a:xfrm>
-          <a:blipFill>
-            <a:blip r:embed="rId2"/>
-            <a:stretch>
-              <a:fillRect l="-1313" t="-1516" r="-1471"/>
-            </a:stretch>
-          </a:blipFill>
-          <a:ln w="12700">
-            <a:miter lim="400000"/>
-          </a:ln>
-        </p:spPr>
-        <p:txBody>
-          <a:bodyPr/>
-          <a:lstStyle/>
-          <a:p>
-            <a:r>
-              <a:rPr lang="en-US">
-                <a:noFill/>
-              </a:rPr>
-              <a:t> </a:t>
-            </a:r>
-          </a:p>
-        </p:txBody>
-      </p:sp>
-      <p:sp>
-        <p:nvSpPr>
-          <p:cNvPr id="412" name="SHapley Additive exPlanations">
-            <a:extLst>
-              <a:ext uri="{FF2B5EF4-FFF2-40B4-BE49-F238E27FC236}">
-                <a16:creationId xmlns:a16="http://schemas.microsoft.com/office/drawing/2014/main" id="{85A60CAC-C6BB-8DC5-55EC-63B6703D4A80}"/>
-              </a:ext>
-            </a:extLst>
-          </p:cNvPr>
-          <p:cNvSpPr txBox="1">
-            <a:spLocks noGrp="1"/>
-          </p:cNvSpPr>
-          <p:nvPr>
-            <p:ph type="title"/>
-          </p:nvPr>
-        </p:nvSpPr>
-        <p:spPr/>
-        <p:txBody>
-          <a:bodyPr/>
-          <a:lstStyle/>
-          <a:p>
-            <a:pPr defTabSz="1265768" eaLnBrk="1" fontAlgn="auto" hangingPunct="1">
-              <a:spcBef>
-                <a:spcPts val="0"/>
-              </a:spcBef>
-              <a:spcAft>
-                <a:spcPts val="0"/>
-              </a:spcAft>
-              <a:defRPr sz="5986" spc="-119">
-                <a:latin typeface="Helvetica Neue Medium"/>
-                <a:ea typeface="Helvetica Neue Medium"/>
-                <a:cs typeface="Helvetica Neue Medium"/>
-                <a:sym typeface="Helvetica Neue Medium"/>
-              </a:defRPr>
-            </a:pPr>
-            <a:r>
-              <a:rPr sz="5986">
-                <a:solidFill>
-                  <a:srgbClr val="009193"/>
-                </a:solidFill>
-                <a:latin typeface="Helvetica Neue UltraLight"/>
-                <a:ea typeface="Helvetica Neue UltraLight"/>
-                <a:cs typeface="Helvetica Neue UltraLight"/>
-                <a:sym typeface="Helvetica Neue UltraLight"/>
-              </a:rPr>
-              <a:t>SH</a:t>
-            </a:r>
-            <a:r>
-              <a:rPr sz="5986">
-                <a:latin typeface="Helvetica Neue UltraLight"/>
-                <a:ea typeface="Helvetica Neue UltraLight"/>
-                <a:cs typeface="Helvetica Neue UltraLight"/>
-                <a:sym typeface="Helvetica Neue UltraLight"/>
-              </a:rPr>
-              <a:t>apley</a:t>
-            </a:r>
-            <a:r>
-              <a:rPr sz="5986">
-                <a:latin typeface="Helvetica Neue Medium"/>
-                <a:ea typeface="Helvetica Neue Medium"/>
-                <a:cs typeface="Helvetica Neue Medium"/>
-                <a:sym typeface="Helvetica Neue Medium"/>
-              </a:rPr>
-              <a:t> </a:t>
-            </a:r>
-            <a:r>
-              <a:rPr sz="5986" b="1">
-                <a:solidFill>
-                  <a:srgbClr val="009193"/>
-                </a:solidFill>
-                <a:latin typeface="Helvetica Neue"/>
-                <a:ea typeface="Helvetica Neue"/>
-                <a:cs typeface="Helvetica Neue"/>
-                <a:sym typeface="Helvetica Neue"/>
-              </a:rPr>
-              <a:t>A</a:t>
-            </a:r>
-            <a:r>
-              <a:rPr sz="5986" b="1">
-                <a:latin typeface="Helvetica Neue"/>
-                <a:ea typeface="Helvetica Neue"/>
-                <a:cs typeface="Helvetica Neue"/>
-                <a:sym typeface="Helvetica Neue"/>
-              </a:rPr>
-              <a:t>dditive</a:t>
-            </a:r>
-            <a:r>
-              <a:rPr sz="5986">
-                <a:latin typeface="Helvetica Neue Medium"/>
-                <a:ea typeface="Helvetica Neue Medium"/>
-                <a:cs typeface="Helvetica Neue Medium"/>
-                <a:sym typeface="Helvetica Neue Medium"/>
-              </a:rPr>
-              <a:t> </a:t>
-            </a:r>
-            <a:r>
-              <a:rPr sz="5986">
-                <a:latin typeface="Helvetica Neue UltraLight"/>
-                <a:ea typeface="Helvetica Neue UltraLight"/>
-                <a:cs typeface="Helvetica Neue UltraLight"/>
-                <a:sym typeface="Helvetica Neue UltraLight"/>
-              </a:rPr>
-              <a:t>ex</a:t>
-            </a:r>
-            <a:r>
-              <a:rPr sz="5986">
-                <a:solidFill>
-                  <a:srgbClr val="009193"/>
-                </a:solidFill>
-                <a:latin typeface="Helvetica Neue UltraLight"/>
-                <a:ea typeface="Helvetica Neue UltraLight"/>
-                <a:cs typeface="Helvetica Neue UltraLight"/>
-                <a:sym typeface="Helvetica Neue UltraLight"/>
-              </a:rPr>
-              <a:t>P</a:t>
-            </a:r>
-            <a:r>
-              <a:rPr sz="5986">
-                <a:latin typeface="Helvetica Neue UltraLight"/>
-                <a:ea typeface="Helvetica Neue UltraLight"/>
-                <a:cs typeface="Helvetica Neue UltraLight"/>
-                <a:sym typeface="Helvetica Neue UltraLight"/>
-              </a:rPr>
-              <a:t>lanations</a:t>
             </a:r>
           </a:p>
         </p:txBody>
